--- a/Lecture slides/AMOS C01 - Demo Day Preparation.pptx
+++ b/Lecture slides/AMOS C01 - Demo Day Preparation.pptx
@@ -11423,7 +11423,7 @@
             <a:tbl>
               <a:tblPr>
                 <a:noFill/>
-                <a:tableStyleId>{1E88BBD0-FCD0-48EA-B842-327650F5B613}</a:tableStyleId>
+                <a:tableStyleId>{04F1B9E1-C823-4F05-A78B-E6476E40316B}</a:tableStyleId>
               </a:tblPr>
               <a:tblGrid>
                 <a:gridCol w="1315250"/>
@@ -13410,6 +13410,46 @@
             </a:r>
             <a:endParaRPr/>
           </a:p>
+          <a:p>
+            <a:pPr indent="0" lvl="0" marL="0" rtl="0" algn="l">
+              <a:spcBef>
+                <a:spcPts val="1200"/>
+              </a:spcBef>
+              <a:spcAft>
+                <a:spcPts val="0"/>
+              </a:spcAft>
+              <a:buNone/>
+            </a:pPr>
+            <a:r>
+              <a:rPr lang="en"/>
+              <a:t>Example of a </a:t>
+            </a:r>
+            <a:r>
+              <a:rPr lang="en" u="sng">
+                <a:solidFill>
+                  <a:schemeClr val="hlink"/>
+                </a:solidFill>
+                <a:hlinkClick r:id="rId3"/>
+              </a:rPr>
+              <a:t>great technical (CLI) demo</a:t>
+            </a:r>
+            <a:endParaRPr/>
+          </a:p>
+          <a:p>
+            <a:pPr indent="0" lvl="0" marL="0" rtl="0" algn="l">
+              <a:spcBef>
+                <a:spcPts val="1200"/>
+              </a:spcBef>
+              <a:spcAft>
+                <a:spcPts val="1200"/>
+              </a:spcAft>
+              <a:buNone/>
+            </a:pPr>
+            <a:r>
+              <a:t/>
+            </a:r>
+            <a:endParaRPr/>
+          </a:p>
         </p:txBody>
       </p:sp>
       <p:sp>
@@ -13473,7 +13513,7 @@
                 <a:solidFill>
                   <a:schemeClr val="hlink"/>
                 </a:solidFill>
-                <a:hlinkClick r:id="rId3"/>
+                <a:hlinkClick r:id="rId4"/>
               </a:rPr>
               <a:t>https://oss.cs.fau.de</a:t>
             </a:r>
@@ -17132,7 +17172,7 @@
             <a:tbl>
               <a:tblPr>
                 <a:noFill/>
-                <a:tableStyleId>{A2E082F3-DF06-4339-A54E-E921D8CA4927}</a:tableStyleId>
+                <a:tableStyleId>{CF4416F8-5E6F-4B6E-B336-B91BB6D304FC}</a:tableStyleId>
               </a:tblPr>
               <a:tblGrid>
                 <a:gridCol w="1432550"/>
@@ -19948,7 +19988,7 @@
 </file>
 
 <file path=ppt/theme/theme1.xml><?xml version="1.0" encoding="utf-8"?>
-<a:theme xmlns:a="http://schemas.openxmlformats.org/drawingml/2006/main" xmlns:r="http://schemas.openxmlformats.org/officeDocument/2006/relationships" name="POSS Slides Template">
+<a:theme xmlns:a="http://schemas.openxmlformats.org/drawingml/2006/main" xmlns:r="http://schemas.openxmlformats.org/officeDocument/2006/relationships" name="AMOS Slides Template">
   <a:themeElements>
     <a:clrScheme name="Simple Light">
       <a:dk1>
@@ -20227,7 +20267,7 @@
 </file>
 
 <file path=ppt/theme/theme2.xml><?xml version="1.0" encoding="utf-8"?>
-<a:theme xmlns:a="http://schemas.openxmlformats.org/drawingml/2006/main" xmlns:r="http://schemas.openxmlformats.org/officeDocument/2006/relationships" name="AMOS Slides Template">
+<a:theme xmlns:a="http://schemas.openxmlformats.org/drawingml/2006/main" xmlns:r="http://schemas.openxmlformats.org/officeDocument/2006/relationships" name="POSS Slides Template">
   <a:themeElements>
     <a:clrScheme name="Simple Light">
       <a:dk1>
